--- a/content/youtube/shorts/SHORT_LLM_03_nihongo_imi.pptx
+++ b/content/youtube/shorts/SHORT_LLM_03_nihongo_imi.pptx
@@ -1328,7 +1328,7 @@
         </p:nvSpPr>
         <p:spPr>
           <a:xfrm>
-            <a:off x="274320" y="2286000"/>
+            <a:off x="274320" y="1371600"/>
             <a:ext cx="3566160" cy="2286000"/>
           </a:xfrm>
           <a:prstGeom prst="rect">
@@ -1356,7 +1356,7 @@
                 <a:ea typeface="Hiragino Sans" pitchFamily="34" charset="-122"/>
                 <a:cs typeface="Hiragino Sans" pitchFamily="34" charset="-120"/>
               </a:rPr>
-              <a:t>日本語LLMを</a:t>
+              <a:t>「国産AIを作れ！」</a:t>
             </a:r>
             <a:endParaRPr lang="en-US" sz="2400" dirty="0"/>
           </a:p>
@@ -1376,7 +1376,7 @@
                 <a:ea typeface="Hiragino Sans" pitchFamily="34" charset="-122"/>
                 <a:cs typeface="Hiragino Sans" pitchFamily="34" charset="-120"/>
               </a:rPr>
-              <a:t>開発する意味は</a:t>
+              <a:t>という人に</a:t>
             </a:r>
             <a:endParaRPr lang="en-US" sz="2400" dirty="0"/>
           </a:p>
@@ -1396,7 +1396,7 @@
                 <a:ea typeface="Hiragino Sans" pitchFamily="34" charset="-122"/>
                 <a:cs typeface="Hiragino Sans" pitchFamily="34" charset="-120"/>
               </a:rPr>
-              <a:t>あるのか？</a:t>
+              <a:t>聞きたい</a:t>
             </a:r>
             <a:endParaRPr lang="en-US" sz="2400" dirty="0"/>
           </a:p>
@@ -1404,7 +1404,46 @@
       </p:sp>
       <p:sp>
         <p:nvSpPr>
-          <p:cNvPr id="3" name="Shape 1"/>
+          <p:cNvPr id="3" name="Text 1"/>
+          <p:cNvSpPr/>
+          <p:nvPr/>
+        </p:nvSpPr>
+        <p:spPr>
+          <a:xfrm>
+            <a:off x="274320" y="4114800"/>
+            <a:ext cx="3566160" cy="914400"/>
+          </a:xfrm>
+          <a:prstGeom prst="rect">
+            <a:avLst/>
+          </a:prstGeom>
+          <a:noFill/>
+          <a:ln/>
+        </p:spPr>
+        <p:txBody>
+          <a:bodyPr wrap="square" rtlCol="0" anchor="t"/>
+          <a:lstStyle/>
+          <a:p>
+            <a:pPr algn="l" indent="0" marL="0">
+              <a:buNone/>
+            </a:pPr>
+            <a:r>
+              <a:rPr lang="en-US" sz="1200" dirty="0">
+                <a:solidFill>
+                  <a:srgbClr val="57534E"/>
+                </a:solidFill>
+                <a:latin typeface="Hiragino Sans" pitchFamily="34" charset="0"/>
+                <a:ea typeface="Hiragino Sans" pitchFamily="34" charset="-122"/>
+                <a:cs typeface="Hiragino Sans" pitchFamily="34" charset="-120"/>
+              </a:rPr>
+              <a:t>楽天、NTT、KDDI…各社が数百億円を投資中</a:t>
+            </a:r>
+            <a:endParaRPr lang="en-US" sz="1200" dirty="0"/>
+          </a:p>
+        </p:txBody>
+      </p:sp>
+      <p:sp>
+        <p:nvSpPr>
+          <p:cNvPr id="4" name="Shape 2"/>
           <p:cNvSpPr/>
           <p:nvPr/>
         </p:nvSpPr>
@@ -1424,7 +1463,7 @@
       </p:sp>
       <p:sp>
         <p:nvSpPr>
-          <p:cNvPr id="4" name="Text 2"/>
+          <p:cNvPr id="5" name="Text 3"/>
           <p:cNvSpPr/>
           <p:nvPr/>
         </p:nvSpPr>
@@ -1529,7 +1568,67 @@
                 <a:ea typeface="Hiragino Sans" pitchFamily="34" charset="-122"/>
                 <a:cs typeface="Hiragino Sans" pitchFamily="34" charset="-120"/>
               </a:rPr>
-              <a:t>日本企業がLLMを作っている</a:t>
+              <a:t>その国産AI、</a:t>
+            </a:r>
+            <a:endParaRPr lang="en-US" sz="2000" dirty="0"/>
+          </a:p>
+          <a:p>
+            <a:pPr algn="l" indent="0" marL="0">
+              <a:lnSpc>
+                <a:spcPct val="130000"/>
+              </a:lnSpc>
+              <a:buNone/>
+            </a:pPr>
+            <a:r>
+              <a:rPr lang="en-US" sz="2000" b="1" dirty="0">
+                <a:solidFill>
+                  <a:srgbClr val="FFFFFF"/>
+                </a:solidFill>
+                <a:latin typeface="Hiragino Sans" pitchFamily="34" charset="0"/>
+                <a:ea typeface="Hiragino Sans" pitchFamily="34" charset="-122"/>
+                <a:cs typeface="Hiragino Sans" pitchFamily="34" charset="-120"/>
+              </a:rPr>
+              <a:t>海外AIの</a:t>
+            </a:r>
+            <a:endParaRPr lang="en-US" sz="2000" dirty="0"/>
+          </a:p>
+          <a:p>
+            <a:pPr algn="l" indent="0" marL="0">
+              <a:lnSpc>
+                <a:spcPct val="130000"/>
+              </a:lnSpc>
+              <a:buNone/>
+            </a:pPr>
+            <a:r>
+              <a:rPr lang="en-US" sz="2000" b="1" dirty="0">
+                <a:solidFill>
+                  <a:srgbClr val="FFFFFF"/>
+                </a:solidFill>
+                <a:latin typeface="Hiragino Sans" pitchFamily="34" charset="0"/>
+                <a:ea typeface="Hiragino Sans" pitchFamily="34" charset="-122"/>
+                <a:cs typeface="Hiragino Sans" pitchFamily="34" charset="-120"/>
+              </a:rPr>
+              <a:t>50倍のコストで</a:t>
+            </a:r>
+            <a:endParaRPr lang="en-US" sz="2000" dirty="0"/>
+          </a:p>
+          <a:p>
+            <a:pPr algn="l" indent="0" marL="0">
+              <a:lnSpc>
+                <a:spcPct val="130000"/>
+              </a:lnSpc>
+              <a:buNone/>
+            </a:pPr>
+            <a:r>
+              <a:rPr lang="en-US" sz="2000" b="1" dirty="0">
+                <a:solidFill>
+                  <a:srgbClr val="FFFFFF"/>
+                </a:solidFill>
+                <a:latin typeface="Hiragino Sans" pitchFamily="34" charset="0"/>
+                <a:ea typeface="Hiragino Sans" pitchFamily="34" charset="-122"/>
+                <a:cs typeface="Hiragino Sans" pitchFamily="34" charset="-120"/>
+              </a:rPr>
+              <a:t>同じことしかできない</a:t>
             </a:r>
             <a:endParaRPr lang="en-US" sz="2000" dirty="0"/>
           </a:p>
@@ -1543,8 +1642,8 @@
         </p:nvSpPr>
         <p:spPr>
           <a:xfrm>
-            <a:off x="274320" y="3657600"/>
-            <a:ext cx="3566160" cy="2286000"/>
+            <a:off x="274320" y="4114800"/>
+            <a:ext cx="3566160" cy="914400"/>
           </a:xfrm>
           <a:prstGeom prst="rect">
             <a:avLst/>
@@ -1556,88 +1655,21 @@
           <a:bodyPr wrap="square" rtlCol="0" anchor="t"/>
           <a:lstStyle/>
           <a:p>
-            <a:pPr marL="342900" indent="-342900">
-              <a:lnSpc>
-                <a:spcPct val="150000"/>
-              </a:lnSpc>
-              <a:buSzPct val="100000"/>
-              <a:buChar char="•"/>
-            </a:pPr>
-            <a:r>
-              <a:rPr lang="en-US" sz="1400" dirty="0">
-                <a:solidFill>
-                  <a:srgbClr val="FAF8F5"/>
-                </a:solidFill>
-                <a:latin typeface="Hiragino Sans" pitchFamily="34" charset="0"/>
-                <a:ea typeface="Hiragino Sans" pitchFamily="34" charset="-122"/>
-                <a:cs typeface="Hiragino Sans" pitchFamily="34" charset="-120"/>
-              </a:rPr>
-              <a:t>楽天 700B（APIなし）</a:t>
-            </a:r>
-            <a:endParaRPr lang="en-US" sz="1400" dirty="0"/>
-          </a:p>
-          <a:p>
-            <a:pPr marL="342900" indent="-342900">
-              <a:lnSpc>
-                <a:spcPct val="150000"/>
-              </a:lnSpc>
-              <a:buSzPct val="100000"/>
-              <a:buChar char="•"/>
-            </a:pPr>
-            <a:r>
-              <a:rPr lang="en-US" sz="1400" dirty="0">
-                <a:solidFill>
-                  <a:srgbClr val="FAF8F5"/>
-                </a:solidFill>
-                <a:latin typeface="Hiragino Sans" pitchFamily="34" charset="0"/>
-                <a:ea typeface="Hiragino Sans" pitchFamily="34" charset="-122"/>
-                <a:cs typeface="Hiragino Sans" pitchFamily="34" charset="-120"/>
-              </a:rPr>
-              <a:t>PLaMo 31B（政府採用）</a:t>
-            </a:r>
-            <a:endParaRPr lang="en-US" sz="1400" dirty="0"/>
-          </a:p>
-          <a:p>
-            <a:pPr marL="342900" indent="-342900">
-              <a:lnSpc>
-                <a:spcPct val="150000"/>
-              </a:lnSpc>
-              <a:buSzPct val="100000"/>
-              <a:buChar char="•"/>
-            </a:pPr>
-            <a:r>
-              <a:rPr lang="en-US" sz="1400" dirty="0">
-                <a:solidFill>
-                  <a:srgbClr val="FAF8F5"/>
-                </a:solidFill>
-                <a:latin typeface="Hiragino Sans" pitchFamily="34" charset="0"/>
-                <a:ea typeface="Hiragino Sans" pitchFamily="34" charset="-122"/>
-                <a:cs typeface="Hiragino Sans" pitchFamily="34" charset="-120"/>
-              </a:rPr>
-              <a:t>tsuzumi 7B（NTT）</a:t>
-            </a:r>
-            <a:endParaRPr lang="en-US" sz="1400" dirty="0"/>
-          </a:p>
-          <a:p>
-            <a:pPr marL="342900" indent="-342900">
-              <a:lnSpc>
-                <a:spcPct val="150000"/>
-              </a:lnSpc>
-              <a:buSzPct val="100000"/>
-              <a:buChar char="•"/>
-            </a:pPr>
-            <a:r>
-              <a:rPr lang="en-US" sz="1400" dirty="0">
-                <a:solidFill>
-                  <a:srgbClr val="FAF8F5"/>
-                </a:solidFill>
-                <a:latin typeface="Hiragino Sans" pitchFamily="34" charset="0"/>
-                <a:ea typeface="Hiragino Sans" pitchFamily="34" charset="-122"/>
-                <a:cs typeface="Hiragino Sans" pitchFamily="34" charset="-120"/>
-              </a:rPr>
-              <a:t>ELYZA 32B（KDDI）</a:t>
-            </a:r>
-            <a:endParaRPr lang="en-US" sz="1400" dirty="0"/>
+            <a:pPr algn="l" indent="0" marL="0">
+              <a:buNone/>
+            </a:pPr>
+            <a:r>
+              <a:rPr lang="en-US" sz="1200" dirty="0">
+                <a:solidFill>
+                  <a:srgbClr val="57534E"/>
+                </a:solidFill>
+                <a:latin typeface="Hiragino Sans" pitchFamily="34" charset="0"/>
+                <a:ea typeface="Hiragino Sans" pitchFamily="34" charset="-122"/>
+                <a:cs typeface="Hiragino Sans" pitchFamily="34" charset="-120"/>
+              </a:rPr>
+              <a:t>GPU自前運用 vs API呼ぶだけ</a:t>
+            </a:r>
+            <a:endParaRPr lang="en-US" sz="1200" dirty="0"/>
           </a:p>
         </p:txBody>
       </p:sp>
@@ -1740,7 +1772,7 @@
         </p:nvSpPr>
         <p:spPr>
           <a:xfrm>
-            <a:off x="274320" y="1371600"/>
+            <a:off x="274320" y="2286000"/>
             <a:ext cx="3566160" cy="2286000"/>
           </a:xfrm>
           <a:prstGeom prst="rect">
@@ -1760,7 +1792,7 @@
               <a:buNone/>
             </a:pPr>
             <a:r>
-              <a:rPr lang="en-US" sz="2000" b="1" dirty="0">
+              <a:rPr lang="en-US" sz="2800" b="1" dirty="0">
                 <a:solidFill>
                   <a:srgbClr val="FFFFFF"/>
                 </a:solidFill>
@@ -1768,9 +1800,9 @@
                 <a:ea typeface="Hiragino Sans" pitchFamily="34" charset="-122"/>
                 <a:cs typeface="Hiragino Sans" pitchFamily="34" charset="-120"/>
               </a:rPr>
-              <a:t>グローバルLLMの日本語は</a:t>
-            </a:r>
-            <a:endParaRPr lang="en-US" sz="2000" dirty="0"/>
+              <a:t>「日本語が得意」</a:t>
+            </a:r>
+            <a:endParaRPr lang="en-US" sz="2800" dirty="0"/>
           </a:p>
           <a:p>
             <a:pPr algn="l" indent="0" marL="0">
@@ -1780,7 +1812,7 @@
               <a:buNone/>
             </a:pPr>
             <a:r>
-              <a:rPr lang="en-US" sz="2000" b="1" dirty="0">
+              <a:rPr lang="en-US" sz="2800" b="1" dirty="0">
                 <a:solidFill>
                   <a:srgbClr val="FFFFFF"/>
                 </a:solidFill>
@@ -1788,100 +1820,75 @@
                 <a:ea typeface="Hiragino Sans" pitchFamily="34" charset="-122"/>
                 <a:cs typeface="Hiragino Sans" pitchFamily="34" charset="-120"/>
               </a:rPr>
-              <a:t>もう十分に使える</a:t>
-            </a:r>
-            <a:endParaRPr lang="en-US" sz="2000" dirty="0"/>
-          </a:p>
-        </p:txBody>
-      </p:sp>
-      <p:sp>
-        <p:nvSpPr>
-          <p:cNvPr id="3" name="Text 1"/>
-          <p:cNvSpPr/>
-          <p:nvPr/>
-        </p:nvSpPr>
-        <p:spPr>
-          <a:xfrm>
-            <a:off x="274320" y="3657600"/>
-            <a:ext cx="3566160" cy="2286000"/>
-          </a:xfrm>
-          <a:prstGeom prst="rect">
-            <a:avLst/>
-          </a:prstGeom>
-          <a:noFill/>
-          <a:ln/>
-        </p:spPr>
-        <p:txBody>
-          <a:bodyPr wrap="square" rtlCol="0" anchor="t"/>
-          <a:lstStyle/>
-          <a:p>
-            <a:pPr marL="342900" indent="-342900">
+              <a:t>って言うけど、</a:t>
+            </a:r>
+            <a:endParaRPr lang="en-US" sz="2800" dirty="0"/>
+          </a:p>
+          <a:p>
+            <a:pPr algn="l" indent="0" marL="0">
               <a:lnSpc>
-                <a:spcPct val="150000"/>
+                <a:spcPct val="130000"/>
               </a:lnSpc>
-              <a:buSzPct val="100000"/>
-              <a:buChar char="•"/>
-            </a:pPr>
-            <a:r>
-              <a:rPr lang="en-US" sz="1400" dirty="0">
-                <a:solidFill>
-                  <a:srgbClr val="FAF8F5"/>
-                </a:solidFill>
-                <a:latin typeface="Hiragino Sans" pitchFamily="34" charset="0"/>
-                <a:ea typeface="Hiragino Sans" pitchFamily="34" charset="-122"/>
-                <a:cs typeface="Hiragino Sans" pitchFamily="34" charset="-120"/>
-              </a:rPr>
-              <a:t>Claude：文化ニュアンス対応済</a:t>
-            </a:r>
-            <a:endParaRPr lang="en-US" sz="1400" dirty="0"/>
-          </a:p>
-          <a:p>
-            <a:pPr marL="342900" indent="-342900">
+              <a:buNone/>
+            </a:pPr>
+            <a:r>
+              <a:rPr lang="en-US" sz="2800" b="1" dirty="0">
+                <a:solidFill>
+                  <a:srgbClr val="FFFFFF"/>
+                </a:solidFill>
+                <a:latin typeface="Hiragino Sans" pitchFamily="34" charset="0"/>
+                <a:ea typeface="Hiragino Sans" pitchFamily="34" charset="-122"/>
+                <a:cs typeface="Hiragino Sans" pitchFamily="34" charset="-120"/>
+              </a:rPr>
+              <a:t>ClaudeもGPTも</a:t>
+            </a:r>
+            <a:endParaRPr lang="en-US" sz="2800" dirty="0"/>
+          </a:p>
+          <a:p>
+            <a:pPr algn="l" indent="0" marL="0">
               <a:lnSpc>
-                <a:spcPct val="150000"/>
+                <a:spcPct val="130000"/>
               </a:lnSpc>
-              <a:buSzPct val="100000"/>
-              <a:buChar char="•"/>
-            </a:pPr>
-            <a:r>
-              <a:rPr lang="en-US" sz="1400" dirty="0">
-                <a:solidFill>
-                  <a:srgbClr val="FAF8F5"/>
-                </a:solidFill>
-                <a:latin typeface="Hiragino Sans" pitchFamily="34" charset="0"/>
-                <a:ea typeface="Hiragino Sans" pitchFamily="34" charset="-122"/>
-                <a:cs typeface="Hiragino Sans" pitchFamily="34" charset="-120"/>
-              </a:rPr>
-              <a:t>GPT：1.1Mコンテキスト</a:t>
-            </a:r>
-            <a:endParaRPr lang="en-US" sz="1400" dirty="0"/>
-          </a:p>
-          <a:p>
-            <a:pPr marL="342900" indent="-342900">
+              <a:buNone/>
+            </a:pPr>
+            <a:r>
+              <a:rPr lang="en-US" sz="2800" b="1" dirty="0">
+                <a:solidFill>
+                  <a:srgbClr val="FFFFFF"/>
+                </a:solidFill>
+                <a:latin typeface="Hiragino Sans" pitchFamily="34" charset="0"/>
+                <a:ea typeface="Hiragino Sans" pitchFamily="34" charset="-122"/>
+                <a:cs typeface="Hiragino Sans" pitchFamily="34" charset="-120"/>
+              </a:rPr>
+              <a:t>日本語で普通に</a:t>
+            </a:r>
+            <a:endParaRPr lang="en-US" sz="2800" dirty="0"/>
+          </a:p>
+          <a:p>
+            <a:pPr algn="l" indent="0" marL="0">
               <a:lnSpc>
-                <a:spcPct val="150000"/>
+                <a:spcPct val="130000"/>
               </a:lnSpc>
-              <a:buSzPct val="100000"/>
-              <a:buChar char="•"/>
-            </a:pPr>
-            <a:r>
-              <a:rPr lang="en-US" sz="1400" dirty="0">
-                <a:solidFill>
-                  <a:srgbClr val="FAF8F5"/>
-                </a:solidFill>
-                <a:latin typeface="Hiragino Sans" pitchFamily="34" charset="0"/>
-                <a:ea typeface="Hiragino Sans" pitchFamily="34" charset="-122"/>
-                <a:cs typeface="Hiragino Sans" pitchFamily="34" charset="-120"/>
-              </a:rPr>
-              <a:t>Gemini：$0.10/100万トークン</a:t>
-            </a:r>
-            <a:endParaRPr lang="en-US" sz="1400" dirty="0"/>
-          </a:p>
-        </p:txBody>
-      </p:sp>
-      <p:sp>
-        <p:nvSpPr>
-          <p:cNvPr id="4" name="Shape 2"/>
+              <a:buNone/>
+            </a:pPr>
+            <a:r>
+              <a:rPr lang="en-US" sz="2800" b="1" dirty="0">
+                <a:solidFill>
+                  <a:srgbClr val="FFFFFF"/>
+                </a:solidFill>
+                <a:latin typeface="Hiragino Sans" pitchFamily="34" charset="0"/>
+                <a:ea typeface="Hiragino Sans" pitchFamily="34" charset="-122"/>
+                <a:cs typeface="Hiragino Sans" pitchFamily="34" charset="-120"/>
+              </a:rPr>
+              <a:t>仕事できてる</a:t>
+            </a:r>
+            <a:endParaRPr lang="en-US" sz="2800" dirty="0"/>
+          </a:p>
+        </p:txBody>
+      </p:sp>
+      <p:sp>
+        <p:nvSpPr>
+          <p:cNvPr id="3" name="Shape 1"/>
           <p:cNvSpPr/>
           <p:nvPr/>
         </p:nvSpPr>
@@ -1901,7 +1908,7 @@
       </p:sp>
       <p:sp>
         <p:nvSpPr>
-          <p:cNvPr id="5" name="Text 3"/>
+          <p:cNvPr id="4" name="Text 2"/>
           <p:cNvSpPr/>
           <p:nvPr/>
         </p:nvSpPr>
@@ -1978,7 +1985,7 @@
         </p:nvSpPr>
         <p:spPr>
           <a:xfrm>
-            <a:off x="274320" y="1371600"/>
+            <a:off x="274320" y="2286000"/>
             <a:ext cx="3566160" cy="2286000"/>
           </a:xfrm>
           <a:prstGeom prst="rect">
@@ -1998,7 +2005,7 @@
               <a:buNone/>
             </a:pPr>
             <a:r>
-              <a:rPr lang="en-US" sz="2000" b="1" dirty="0">
+              <a:rPr lang="en-US" sz="2800" b="1" dirty="0">
                 <a:solidFill>
                   <a:srgbClr val="FFFFFF"/>
                 </a:solidFill>
@@ -2006,118 +2013,95 @@
                 <a:ea typeface="Hiragino Sans" pitchFamily="34" charset="-122"/>
                 <a:cs typeface="Hiragino Sans" pitchFamily="34" charset="-120"/>
               </a:rPr>
-              <a:t>コスト差は最大50倍</a:t>
-            </a:r>
-            <a:endParaRPr lang="en-US" sz="2000" dirty="0"/>
-          </a:p>
-        </p:txBody>
-      </p:sp>
-      <p:sp>
-        <p:nvSpPr>
-          <p:cNvPr id="3" name="Text 1"/>
-          <p:cNvSpPr/>
-          <p:nvPr/>
-        </p:nvSpPr>
-        <p:spPr>
-          <a:xfrm>
-            <a:off x="274320" y="3657600"/>
-            <a:ext cx="3566160" cy="2286000"/>
-          </a:xfrm>
-          <a:prstGeom prst="rect">
-            <a:avLst/>
-          </a:prstGeom>
-          <a:noFill/>
-          <a:ln/>
-        </p:spPr>
-        <p:txBody>
-          <a:bodyPr wrap="square" rtlCol="0" anchor="t"/>
-          <a:lstStyle/>
-          <a:p>
-            <a:pPr marL="342900" indent="-342900">
+              <a:t>モデルを作る</a:t>
+            </a:r>
+            <a:endParaRPr lang="en-US" sz="2800" dirty="0"/>
+          </a:p>
+          <a:p>
+            <a:pPr algn="l" indent="0" marL="0">
               <a:lnSpc>
-                <a:spcPct val="150000"/>
+                <a:spcPct val="130000"/>
               </a:lnSpc>
-              <a:buSzPct val="100000"/>
-              <a:buChar char="•"/>
-            </a:pPr>
-            <a:r>
-              <a:rPr lang="en-US" sz="1400" dirty="0">
-                <a:solidFill>
-                  <a:srgbClr val="FAF8F5"/>
-                </a:solidFill>
-                <a:latin typeface="Hiragino Sans" pitchFamily="34" charset="0"/>
-                <a:ea typeface="Hiragino Sans" pitchFamily="34" charset="-122"/>
-                <a:cs typeface="Hiragino Sans" pitchFamily="34" charset="-120"/>
-              </a:rPr>
-              <a:t>Gemini Flash-Lite: $0.10</a:t>
-            </a:r>
-            <a:endParaRPr lang="en-US" sz="1400" dirty="0"/>
-          </a:p>
-          <a:p>
-            <a:pPr marL="342900" indent="-342900">
+              <a:buNone/>
+            </a:pPr>
+            <a:r>
+              <a:rPr lang="en-US" sz="2800" b="1" dirty="0">
+                <a:solidFill>
+                  <a:srgbClr val="FFFFFF"/>
+                </a:solidFill>
+                <a:latin typeface="Hiragino Sans" pitchFamily="34" charset="0"/>
+                <a:ea typeface="Hiragino Sans" pitchFamily="34" charset="-122"/>
+                <a:cs typeface="Hiragino Sans" pitchFamily="34" charset="-120"/>
+              </a:rPr>
+              <a:t>競争をしている間に、</a:t>
+            </a:r>
+            <a:endParaRPr lang="en-US" sz="2800" dirty="0"/>
+          </a:p>
+          <a:p>
+            <a:pPr algn="l" indent="0" marL="0">
               <a:lnSpc>
-                <a:spcPct val="150000"/>
+                <a:spcPct val="130000"/>
               </a:lnSpc>
-              <a:buSzPct val="100000"/>
-              <a:buChar char="•"/>
-            </a:pPr>
-            <a:r>
-              <a:rPr lang="en-US" sz="1400" dirty="0">
-                <a:solidFill>
-                  <a:srgbClr val="FAF8F5"/>
-                </a:solidFill>
-                <a:latin typeface="Hiragino Sans" pitchFamily="34" charset="0"/>
-                <a:ea typeface="Hiragino Sans" pitchFamily="34" charset="-122"/>
-                <a:cs typeface="Hiragino Sans" pitchFamily="34" charset="-120"/>
-              </a:rPr>
-              <a:t>国産セルフホスト: GPU月額数百万円</a:t>
-            </a:r>
-            <a:endParaRPr lang="en-US" sz="1400" dirty="0"/>
-          </a:p>
-        </p:txBody>
-      </p:sp>
-      <p:sp>
-        <p:nvSpPr>
-          <p:cNvPr id="4" name="Text 2"/>
-          <p:cNvSpPr/>
-          <p:nvPr/>
-        </p:nvSpPr>
-        <p:spPr>
-          <a:xfrm>
-            <a:off x="274320" y="5669280"/>
-            <a:ext cx="3566160" cy="914400"/>
-          </a:xfrm>
-          <a:prstGeom prst="rect">
-            <a:avLst/>
-          </a:prstGeom>
-          <a:noFill/>
-          <a:ln/>
-        </p:spPr>
-        <p:txBody>
-          <a:bodyPr wrap="square" rtlCol="0" anchor="t"/>
-          <a:lstStyle/>
+              <a:buNone/>
+            </a:pPr>
+            <a:r>
+              <a:rPr lang="en-US" sz="2800" b="1" dirty="0">
+                <a:solidFill>
+                  <a:srgbClr val="FFFFFF"/>
+                </a:solidFill>
+                <a:latin typeface="Hiragino Sans" pitchFamily="34" charset="0"/>
+                <a:ea typeface="Hiragino Sans" pitchFamily="34" charset="-122"/>
+                <a:cs typeface="Hiragino Sans" pitchFamily="34" charset="-120"/>
+              </a:rPr>
+              <a:t>モデルを使って</a:t>
+            </a:r>
+            <a:endParaRPr lang="en-US" sz="2800" dirty="0"/>
+          </a:p>
           <a:p>
             <a:pPr algn="l" indent="0" marL="0">
-              <a:buNone/>
-            </a:pPr>
-            <a:r>
-              <a:rPr lang="en-US" sz="1200" dirty="0">
-                <a:solidFill>
-                  <a:srgbClr val="57534E"/>
-                </a:solidFill>
-                <a:latin typeface="Hiragino Sans" pitchFamily="34" charset="0"/>
-                <a:ea typeface="Hiragino Sans" pitchFamily="34" charset="-122"/>
-                <a:cs typeface="Hiragino Sans" pitchFamily="34" charset="-120"/>
-              </a:rPr>
-              <a:t>同じ仕事をするのにこの差</a:t>
-            </a:r>
-            <a:endParaRPr lang="en-US" sz="1200" dirty="0"/>
-          </a:p>
-        </p:txBody>
-      </p:sp>
-      <p:sp>
-        <p:nvSpPr>
-          <p:cNvPr id="5" name="Shape 3"/>
+              <a:lnSpc>
+                <a:spcPct val="130000"/>
+              </a:lnSpc>
+              <a:buNone/>
+            </a:pPr>
+            <a:r>
+              <a:rPr lang="en-US" sz="2800" b="1" dirty="0">
+                <a:solidFill>
+                  <a:srgbClr val="FFFFFF"/>
+                </a:solidFill>
+                <a:latin typeface="Hiragino Sans" pitchFamily="34" charset="0"/>
+                <a:ea typeface="Hiragino Sans" pitchFamily="34" charset="-122"/>
+                <a:cs typeface="Hiragino Sans" pitchFamily="34" charset="-120"/>
+              </a:rPr>
+              <a:t>業務を変えた会社が</a:t>
+            </a:r>
+            <a:endParaRPr lang="en-US" sz="2800" dirty="0"/>
+          </a:p>
+          <a:p>
+            <a:pPr algn="l" indent="0" marL="0">
+              <a:lnSpc>
+                <a:spcPct val="130000"/>
+              </a:lnSpc>
+              <a:buNone/>
+            </a:pPr>
+            <a:r>
+              <a:rPr lang="en-US" sz="2800" b="1" dirty="0">
+                <a:solidFill>
+                  <a:srgbClr val="FFFFFF"/>
+                </a:solidFill>
+                <a:latin typeface="Hiragino Sans" pitchFamily="34" charset="0"/>
+                <a:ea typeface="Hiragino Sans" pitchFamily="34" charset="-122"/>
+                <a:cs typeface="Hiragino Sans" pitchFamily="34" charset="-120"/>
+              </a:rPr>
+              <a:t>勝っている</a:t>
+            </a:r>
+            <a:endParaRPr lang="en-US" sz="2800" dirty="0"/>
+          </a:p>
+        </p:txBody>
+      </p:sp>
+      <p:sp>
+        <p:nvSpPr>
+          <p:cNvPr id="3" name="Shape 1"/>
           <p:cNvSpPr/>
           <p:nvPr/>
         </p:nvSpPr>
@@ -2137,7 +2121,7 @@
       </p:sp>
       <p:sp>
         <p:nvSpPr>
-          <p:cNvPr id="6" name="Text 4"/>
+          <p:cNvPr id="4" name="Text 2"/>
           <p:cNvSpPr/>
           <p:nvPr/>
         </p:nvSpPr>
@@ -2242,7 +2226,7 @@
                 <a:ea typeface="Hiragino Sans" pitchFamily="34" charset="-122"/>
                 <a:cs typeface="Hiragino Sans" pitchFamily="34" charset="-120"/>
               </a:rPr>
-              <a:t>必要なのは</a:t>
+              <a:t>問題は</a:t>
             </a:r>
             <a:endParaRPr lang="en-US" sz="2800" dirty="0"/>
           </a:p>
@@ -2262,7 +2246,7 @@
                 <a:ea typeface="Hiragino Sans" pitchFamily="34" charset="-122"/>
                 <a:cs typeface="Hiragino Sans" pitchFamily="34" charset="-120"/>
               </a:rPr>
-              <a:t>「日本語モデル」</a:t>
+              <a:t>「どのAIか」</a:t>
             </a:r>
             <a:endParaRPr lang="en-US" sz="2800" dirty="0"/>
           </a:p>
@@ -2282,7 +2266,7 @@
                 <a:ea typeface="Hiragino Sans" pitchFamily="34" charset="-122"/>
                 <a:cs typeface="Hiragino Sans" pitchFamily="34" charset="-120"/>
               </a:rPr>
-              <a:t>ではなく</a:t>
+              <a:t>じゃない。</a:t>
             </a:r>
             <a:endParaRPr lang="en-US" sz="2800" dirty="0"/>
           </a:p>
@@ -2302,7 +2286,7 @@
                 <a:ea typeface="Hiragino Sans" pitchFamily="34" charset="-122"/>
                 <a:cs typeface="Hiragino Sans" pitchFamily="34" charset="-120"/>
               </a:rPr>
-              <a:t>「業務設計」</a:t>
+              <a:t>「何をさせるか」</a:t>
             </a:r>
             <a:endParaRPr lang="en-US" sz="2800" dirty="0"/>
           </a:p>
@@ -2341,7 +2325,7 @@
                 <a:ea typeface="Hiragino Sans" pitchFamily="34" charset="-122"/>
                 <a:cs typeface="Hiragino Sans" pitchFamily="34" charset="-120"/>
               </a:rPr>
-              <a:t>どのLLMかより</a:t>
+              <a:t>Source→Input→Process→Output</a:t>
             </a:r>
             <a:endParaRPr lang="en-US" sz="1200" dirty="0"/>
           </a:p>
@@ -2358,7 +2342,7 @@
                 <a:ea typeface="Hiragino Sans" pitchFamily="34" charset="-122"/>
                 <a:cs typeface="Hiragino Sans" pitchFamily="34" charset="-120"/>
               </a:rPr>
-              <a:t>何をInputに何をOutputにするかが100倍重要</a:t>
+              <a:t>業務設計がすべて</a:t>
             </a:r>
             <a:endParaRPr lang="en-US" sz="1200" dirty="0"/>
           </a:p>
@@ -2491,7 +2475,7 @@
                 <a:ea typeface="Hiragino Sans" pitchFamily="34" charset="-122"/>
                 <a:cs typeface="Hiragino Sans" pitchFamily="34" charset="-120"/>
               </a:rPr>
-              <a:t>業務設計 →</a:t>
+              <a:t>モデル選びより、</a:t>
             </a:r>
             <a:endParaRPr lang="en-US" sz="2000" dirty="0"/>
           </a:p>
@@ -2511,7 +2495,7 @@
                 <a:ea typeface="Hiragino Sans" pitchFamily="34" charset="-122"/>
                 <a:cs typeface="Hiragino Sans" pitchFamily="34" charset="-120"/>
               </a:rPr>
-              <a:t>SIPOフレームワーク</a:t>
+              <a:t>業務設計。</a:t>
             </a:r>
             <a:endParaRPr lang="en-US" sz="2000" dirty="0"/>
           </a:p>
@@ -2537,23 +2521,6 @@
         <p:txBody>
           <a:bodyPr wrap="square" rtlCol="0" anchor="t"/>
           <a:lstStyle/>
-          <a:p>
-            <a:pPr algn="l" indent="0" marL="0">
-              <a:buNone/>
-            </a:pPr>
-            <a:r>
-              <a:rPr lang="en-US" sz="1200" dirty="0">
-                <a:solidFill>
-                  <a:srgbClr val="57534E"/>
-                </a:solidFill>
-                <a:latin typeface="Hiragino Sans" pitchFamily="34" charset="0"/>
-                <a:ea typeface="Hiragino Sans" pitchFamily="34" charset="-122"/>
-                <a:cs typeface="Hiragino Sans" pitchFamily="34" charset="-120"/>
-              </a:rPr>
-              <a:t>この動画はPowerPointからInsight Training Studioで自動生成しています</a:t>
-            </a:r>
-            <a:endParaRPr lang="en-US" sz="1200" dirty="0"/>
-          </a:p>
           <a:p>
             <a:pPr algn="l" indent="0" marL="0">
               <a:buNone/>
